--- a/template/Cluster2_Daily_Report_SINGLE_Template.pptx
+++ b/template/Cluster2_Daily_Report_SINGLE_Template.pptx
@@ -4365,7 +4365,18 @@
                 <a:ea typeface="Plus Jakarta Sans" pitchFamily="34" charset="-122"/>
                 <a:cs typeface="Plus Jakarta Sans" pitchFamily="34" charset="-120"/>
               </a:rPr>
-              <a:t>—/— · —%</a:t>
+              <a:t>—/— · </a:t>
+            </a:r>
+            <a:r>
+              <a:rPr lang="en-US" sz="850" dirty="0" b="1">
+                <a:solidFill>
+                  <a:srgbClr val="D7D2E9"/>
+                </a:solidFill>
+                <a:latin typeface="Plus Jakarta Sans" pitchFamily="34" charset="0"/>
+                <a:ea typeface="Plus Jakarta Sans" pitchFamily="34" charset="-122"/>
+                <a:cs typeface="Plus Jakarta Sans" pitchFamily="34" charset="-120"/>
+              </a:rPr>
+              <a:t>—%</a:t>
             </a:r>
             <a:endParaRPr lang="en-US" sz="850" dirty="0"/>
           </a:p>
@@ -5087,7 +5098,18 @@
                 <a:ea typeface="Plus Jakarta Sans" pitchFamily="34" charset="-122"/>
                 <a:cs typeface="Plus Jakarta Sans" pitchFamily="34" charset="-120"/>
               </a:rPr>
-              <a:t>—/— · —%</a:t>
+              <a:t>—/— · </a:t>
+            </a:r>
+            <a:r>
+              <a:rPr lang="en-US" sz="850" dirty="0" b="1">
+                <a:solidFill>
+                  <a:srgbClr val="D7D2E9"/>
+                </a:solidFill>
+                <a:latin typeface="Plus Jakarta Sans" pitchFamily="34" charset="0"/>
+                <a:ea typeface="Plus Jakarta Sans" pitchFamily="34" charset="-122"/>
+                <a:cs typeface="Plus Jakarta Sans" pitchFamily="34" charset="-120"/>
+              </a:rPr>
+              <a:t>—%</a:t>
             </a:r>
             <a:endParaRPr lang="en-US" sz="850" dirty="0"/>
           </a:p>
@@ -6595,7 +6617,18 @@
                 <a:ea typeface="Plus Jakarta Sans" pitchFamily="34" charset="-122"/>
                 <a:cs typeface="Plus Jakarta Sans" pitchFamily="34" charset="-120"/>
               </a:rPr>
-              <a:t>—/— · —%</a:t>
+              <a:t>—/— · </a:t>
+            </a:r>
+            <a:r>
+              <a:rPr lang="en-US" sz="850" dirty="0" b="1">
+                <a:solidFill>
+                  <a:srgbClr val="D7D2E9"/>
+                </a:solidFill>
+                <a:latin typeface="Plus Jakarta Sans" pitchFamily="34" charset="0"/>
+                <a:ea typeface="Plus Jakarta Sans" pitchFamily="34" charset="-122"/>
+                <a:cs typeface="Plus Jakarta Sans" pitchFamily="34" charset="-120"/>
+              </a:rPr>
+              <a:t>—%</a:t>
             </a:r>
             <a:endParaRPr lang="en-US" sz="850" dirty="0"/>
           </a:p>
@@ -7770,7 +7803,18 @@
                 <a:ea typeface="Plus Jakarta Sans" pitchFamily="34" charset="-122"/>
                 <a:cs typeface="Plus Jakarta Sans" pitchFamily="34" charset="-120"/>
               </a:rPr>
-              <a:t>—/— · —%</a:t>
+              <a:t>—/— · </a:t>
+            </a:r>
+            <a:r>
+              <a:rPr lang="en-US" sz="850" dirty="0" b="1">
+                <a:solidFill>
+                  <a:srgbClr val="D7D2E9"/>
+                </a:solidFill>
+                <a:latin typeface="Plus Jakarta Sans" pitchFamily="34" charset="0"/>
+                <a:ea typeface="Plus Jakarta Sans" pitchFamily="34" charset="-122"/>
+                <a:cs typeface="Plus Jakarta Sans" pitchFamily="34" charset="-120"/>
+              </a:rPr>
+              <a:t>—%</a:t>
             </a:r>
             <a:endParaRPr lang="en-US" sz="850" dirty="0"/>
           </a:p>
